--- a/diagrams/two_stage_transformer_diagram_final.pptx
+++ b/diagrams/two_stage_transformer_diagram_final.pptx
@@ -302,7 +302,7 @@
           <a:p>
             <a:fld id="{5BCAD085-E8A6-8845-BD4E-CB4CCA059FC4}" type="datetimeFigureOut">
               <a:rPr lang="en-US" smtClean="0"/>
-              <a:t>6/3/26</a:t>
+              <a:t>6/12/26</a:t>
             </a:fld>
             <a:endParaRPr lang="en-US"/>
           </a:p>
@@ -470,7 +470,7 @@
           <a:p>
             <a:fld id="{5BCAD085-E8A6-8845-BD4E-CB4CCA059FC4}" type="datetimeFigureOut">
               <a:rPr lang="en-US" smtClean="0"/>
-              <a:t>6/3/26</a:t>
+              <a:t>6/12/26</a:t>
             </a:fld>
             <a:endParaRPr lang="en-US"/>
           </a:p>
@@ -648,7 +648,7 @@
           <a:p>
             <a:fld id="{5BCAD085-E8A6-8845-BD4E-CB4CCA059FC4}" type="datetimeFigureOut">
               <a:rPr lang="en-US" smtClean="0"/>
-              <a:t>6/3/26</a:t>
+              <a:t>6/12/26</a:t>
             </a:fld>
             <a:endParaRPr lang="en-US"/>
           </a:p>
@@ -816,7 +816,7 @@
           <a:p>
             <a:fld id="{5BCAD085-E8A6-8845-BD4E-CB4CCA059FC4}" type="datetimeFigureOut">
               <a:rPr lang="en-US" smtClean="0"/>
-              <a:t>6/3/26</a:t>
+              <a:t>6/12/26</a:t>
             </a:fld>
             <a:endParaRPr lang="en-US"/>
           </a:p>
@@ -1061,7 +1061,7 @@
           <a:p>
             <a:fld id="{5BCAD085-E8A6-8845-BD4E-CB4CCA059FC4}" type="datetimeFigureOut">
               <a:rPr lang="en-US" smtClean="0"/>
-              <a:t>6/3/26</a:t>
+              <a:t>6/12/26</a:t>
             </a:fld>
             <a:endParaRPr lang="en-US"/>
           </a:p>
@@ -1346,7 +1346,7 @@
           <a:p>
             <a:fld id="{5BCAD085-E8A6-8845-BD4E-CB4CCA059FC4}" type="datetimeFigureOut">
               <a:rPr lang="en-US" smtClean="0"/>
-              <a:t>6/3/26</a:t>
+              <a:t>6/12/26</a:t>
             </a:fld>
             <a:endParaRPr lang="en-US"/>
           </a:p>
@@ -1765,7 +1765,7 @@
           <a:p>
             <a:fld id="{5BCAD085-E8A6-8845-BD4E-CB4CCA059FC4}" type="datetimeFigureOut">
               <a:rPr lang="en-US" smtClean="0"/>
-              <a:t>6/3/26</a:t>
+              <a:t>6/12/26</a:t>
             </a:fld>
             <a:endParaRPr lang="en-US"/>
           </a:p>
@@ -1882,7 +1882,7 @@
           <a:p>
             <a:fld id="{5BCAD085-E8A6-8845-BD4E-CB4CCA059FC4}" type="datetimeFigureOut">
               <a:rPr lang="en-US" smtClean="0"/>
-              <a:t>6/3/26</a:t>
+              <a:t>6/12/26</a:t>
             </a:fld>
             <a:endParaRPr lang="en-US"/>
           </a:p>
@@ -1977,7 +1977,7 @@
           <a:p>
             <a:fld id="{5BCAD085-E8A6-8845-BD4E-CB4CCA059FC4}" type="datetimeFigureOut">
               <a:rPr lang="en-US" smtClean="0"/>
-              <a:t>6/3/26</a:t>
+              <a:t>6/12/26</a:t>
             </a:fld>
             <a:endParaRPr lang="en-US"/>
           </a:p>
@@ -2252,7 +2252,7 @@
           <a:p>
             <a:fld id="{5BCAD085-E8A6-8845-BD4E-CB4CCA059FC4}" type="datetimeFigureOut">
               <a:rPr lang="en-US" smtClean="0"/>
-              <a:t>6/3/26</a:t>
+              <a:t>6/12/26</a:t>
             </a:fld>
             <a:endParaRPr lang="en-US"/>
           </a:p>
@@ -2504,7 +2504,7 @@
           <a:p>
             <a:fld id="{5BCAD085-E8A6-8845-BD4E-CB4CCA059FC4}" type="datetimeFigureOut">
               <a:rPr lang="en-US" smtClean="0"/>
-              <a:t>6/3/26</a:t>
+              <a:t>6/12/26</a:t>
             </a:fld>
             <a:endParaRPr lang="en-US"/>
           </a:p>
@@ -2715,7 +2715,7 @@
           <a:p>
             <a:fld id="{5BCAD085-E8A6-8845-BD4E-CB4CCA059FC4}" type="datetimeFigureOut">
               <a:rPr lang="en-US" smtClean="0"/>
-              <a:t>6/3/26</a:t>
+              <a:t>6/12/26</a:t>
             </a:fld>
             <a:endParaRPr lang="en-US"/>
           </a:p>
@@ -3156,7 +3156,7 @@
         </p:nvSpPr>
         <p:spPr>
           <a:xfrm>
-            <a:off x="1278604" y="1278904"/>
+            <a:off x="1218604" y="1278232"/>
             <a:ext cx="800860" cy="338554"/>
           </a:xfrm>
           <a:prstGeom prst="rect">
@@ -3439,8 +3439,8 @@
         </p:nvSpPr>
         <p:spPr>
           <a:xfrm>
-            <a:off x="5099240" y="2373815"/>
-            <a:ext cx="2845340" cy="594360"/>
+            <a:off x="5099240" y="2380474"/>
+            <a:ext cx="2845340" cy="607483"/>
           </a:xfrm>
           <a:prstGeom prst="roundRect">
             <a:avLst>
@@ -4032,7 +4032,7 @@
         </p:nvCxnSpPr>
         <p:spPr>
           <a:xfrm flipH="1">
-            <a:off x="2560320" y="1980590"/>
+            <a:off x="2560320" y="1995580"/>
             <a:ext cx="1097280" cy="381305"/>
           </a:xfrm>
           <a:prstGeom prst="line">
@@ -4067,7 +4067,7 @@
         </p:nvCxnSpPr>
         <p:spPr>
           <a:xfrm>
-            <a:off x="5486400" y="1980590"/>
+            <a:off x="5486400" y="1995580"/>
             <a:ext cx="1132027" cy="373990"/>
           </a:xfrm>
           <a:prstGeom prst="line">
@@ -4103,9 +4103,9 @@
           <p:nvPr/>
         </p:nvCxnSpPr>
         <p:spPr>
-          <a:xfrm flipH="1">
-            <a:off x="5982789" y="2968604"/>
-            <a:ext cx="635638" cy="773431"/>
+          <a:xfrm>
+            <a:off x="5486400" y="2988268"/>
+            <a:ext cx="0" cy="773431"/>
           </a:xfrm>
           <a:prstGeom prst="line">
             <a:avLst/>
@@ -4398,7 +4398,7 @@
         </p:nvCxnSpPr>
         <p:spPr>
           <a:xfrm>
-            <a:off x="2019909" y="8140903"/>
+            <a:off x="2019909" y="8170883"/>
             <a:ext cx="1687068" cy="492861"/>
           </a:xfrm>
           <a:prstGeom prst="line">
@@ -4468,7 +4468,7 @@
         </p:nvCxnSpPr>
         <p:spPr>
           <a:xfrm flipH="1">
-            <a:off x="5535777" y="8129016"/>
+            <a:off x="5535777" y="8158996"/>
             <a:ext cx="1712671" cy="504748"/>
           </a:xfrm>
           <a:prstGeom prst="line">
